--- a/data/deep_dives/carteira_pagseguro_1c633be3/exports/documentary_comparison.pptx
+++ b/data/deep_dives/carteira_pagseguro_1c633be3/exports/documentary_comparison.pptx
@@ -4286,7 +4286,7 @@
                       <a:r>
                         <a:rPr sz="1300" b="1">
                           <a:solidFill>
-                            <a:srgbClr val="1F1F1F"/>
+                            <a:srgbClr val="FFFFFF"/>
                           </a:solidFill>
                           <a:latin typeface="Calibri"/>
                         </a:rPr>
@@ -4296,7 +4296,7 @@
                   </a:txBody>
                   <a:tcPr marL="91440" marR="91440" marT="41148" marB="41148" anchor="ctr">
                     <a:solidFill>
-                      <a:srgbClr val="EC7000"/>
+                      <a:srgbClr val="FF6200"/>
                     </a:solidFill>
                     <a:lnL>
                       <a:noFill/>
@@ -4335,7 +4335,7 @@
                       <a:r>
                         <a:rPr sz="1300" b="1">
                           <a:solidFill>
-                            <a:srgbClr val="1F1F1F"/>
+                            <a:srgbClr val="FFFFFF"/>
                           </a:solidFill>
                           <a:latin typeface="Calibri"/>
                         </a:rPr>
@@ -4345,7 +4345,7 @@
                   </a:txBody>
                   <a:tcPr marL="91440" marR="91440" marT="41148" marB="41148" anchor="ctr">
                     <a:solidFill>
-                      <a:srgbClr val="EC7000"/>
+                      <a:srgbClr val="FF6200"/>
                     </a:solidFill>
                     <a:lnL>
                       <a:noFill/>
@@ -4629,7 +4629,7 @@
                           </a:solidFill>
                           <a:latin typeface="Calibri"/>
                         </a:rPr>
-                        <a:t>Devedor na figura de credenciador; confirmar contrato da UR</a:t>
+                        <a:t>Devedor na figura de credenciador</a:t>
                       </a:r>
                     </a:p>
                   </a:txBody>
@@ -5123,7 +5123,7 @@
                       <a:r>
                         <a:rPr sz="1300" b="1">
                           <a:solidFill>
-                            <a:srgbClr val="1F1F1F"/>
+                            <a:srgbClr val="FFFFFF"/>
                           </a:solidFill>
                           <a:latin typeface="Calibri"/>
                         </a:rPr>
@@ -5133,7 +5133,7 @@
                   </a:txBody>
                   <a:tcPr marL="91440" marR="91440" marT="41148" marB="41148" anchor="ctr">
                     <a:solidFill>
-                      <a:srgbClr val="EC7000"/>
+                      <a:srgbClr val="FF6200"/>
                     </a:solidFill>
                     <a:lnL>
                       <a:noFill/>
@@ -5172,7 +5172,7 @@
                       <a:r>
                         <a:rPr sz="1300" b="1">
                           <a:solidFill>
-                            <a:srgbClr val="1F1F1F"/>
+                            <a:srgbClr val="FFFFFF"/>
                           </a:solidFill>
                           <a:latin typeface="Calibri"/>
                         </a:rPr>
@@ -5182,7 +5182,7 @@
                   </a:txBody>
                   <a:tcPr marL="91440" marR="91440" marT="41148" marB="41148" anchor="ctr">
                     <a:solidFill>
-                      <a:srgbClr val="EC7000"/>
+                      <a:srgbClr val="FF6200"/>
                     </a:solidFill>
                     <a:lnL>
                       <a:noFill/>
@@ -5682,7 +5682,7 @@
                           </a:solidFill>
                           <a:latin typeface="Calibri"/>
                         </a:rPr>
-                        <a:t>Não localizado nas fontes acessíveis desta leitura</a:t>
+                        <a:t>-</a:t>
                       </a:r>
                     </a:p>
                   </a:txBody>
@@ -5886,7 +5886,7 @@
                       <a:r>
                         <a:rPr sz="1300" b="1">
                           <a:solidFill>
-                            <a:srgbClr val="1F1F1F"/>
+                            <a:srgbClr val="FFFFFF"/>
                           </a:solidFill>
                           <a:latin typeface="Calibri"/>
                         </a:rPr>
@@ -5896,7 +5896,7 @@
                   </a:txBody>
                   <a:tcPr marL="91440" marR="91440" marT="41148" marB="41148" anchor="ctr">
                     <a:solidFill>
-                      <a:srgbClr val="EC7000"/>
+                      <a:srgbClr val="FF6200"/>
                     </a:solidFill>
                     <a:lnL>
                       <a:noFill/>
@@ -5935,7 +5935,7 @@
                       <a:r>
                         <a:rPr sz="1300" b="1">
                           <a:solidFill>
-                            <a:srgbClr val="1F1F1F"/>
+                            <a:srgbClr val="FFFFFF"/>
                           </a:solidFill>
                           <a:latin typeface="Calibri"/>
                         </a:rPr>
@@ -5945,7 +5945,7 @@
                   </a:txBody>
                   <a:tcPr marL="91440" marR="91440" marT="41148" marB="41148" anchor="ctr">
                     <a:solidFill>
-                      <a:srgbClr val="EC7000"/>
+                      <a:srgbClr val="FF6200"/>
                     </a:solidFill>
                     <a:lnL>
                       <a:noFill/>
@@ -6133,7 +6133,7 @@
                           </a:solidFill>
                           <a:latin typeface="Calibri"/>
                         </a:rPr>
-                        <a:t>Não localizado nas fontes acessíveis desta leitura</a:t>
+                        <a:t>-</a:t>
                       </a:r>
                     </a:p>
                   </a:txBody>
@@ -6863,7 +6863,7 @@
                       <a:r>
                         <a:rPr sz="1300" b="1">
                           <a:solidFill>
-                            <a:srgbClr val="1F1F1F"/>
+                            <a:srgbClr val="FFFFFF"/>
                           </a:solidFill>
                           <a:latin typeface="Calibri"/>
                         </a:rPr>
@@ -6873,7 +6873,7 @@
                   </a:txBody>
                   <a:tcPr marL="91440" marR="91440" marT="41148" marB="41148" anchor="ctr">
                     <a:solidFill>
-                      <a:srgbClr val="EC7000"/>
+                      <a:srgbClr val="FF6200"/>
                     </a:solidFill>
                     <a:lnL>
                       <a:noFill/>
@@ -6912,7 +6912,7 @@
                       <a:r>
                         <a:rPr sz="1300" b="1">
                           <a:solidFill>
-                            <a:srgbClr val="1F1F1F"/>
+                            <a:srgbClr val="FFFFFF"/>
                           </a:solidFill>
                           <a:latin typeface="Calibri"/>
                         </a:rPr>
@@ -6922,7 +6922,7 @@
                   </a:txBody>
                   <a:tcPr marL="91440" marR="91440" marT="41148" marB="41148" anchor="ctr">
                     <a:solidFill>
-                      <a:srgbClr val="EC7000"/>
+                      <a:srgbClr val="FF6200"/>
                     </a:solidFill>
                     <a:lnL>
                       <a:noFill/>
@@ -7508,7 +7508,7 @@
                       <a:r>
                         <a:rPr sz="1300" b="1">
                           <a:solidFill>
-                            <a:srgbClr val="1F1F1F"/>
+                            <a:srgbClr val="FFFFFF"/>
                           </a:solidFill>
                           <a:latin typeface="Calibri"/>
                         </a:rPr>
@@ -7518,7 +7518,7 @@
                   </a:txBody>
                   <a:tcPr marL="91440" marR="91440" marT="41148" marB="41148" anchor="ctr">
                     <a:solidFill>
-                      <a:srgbClr val="EC7000"/>
+                      <a:srgbClr val="FF6200"/>
                     </a:solidFill>
                     <a:lnL>
                       <a:noFill/>
@@ -7557,7 +7557,7 @@
                       <a:r>
                         <a:rPr sz="1300" b="1">
                           <a:solidFill>
-                            <a:srgbClr val="1F1F1F"/>
+                            <a:srgbClr val="FFFFFF"/>
                           </a:solidFill>
                           <a:latin typeface="Calibri"/>
                         </a:rPr>
@@ -7567,7 +7567,7 @@
                   </a:txBody>
                   <a:tcPr marL="91440" marR="91440" marT="41148" marB="41148" anchor="ctr">
                     <a:solidFill>
-                      <a:srgbClr val="EC7000"/>
+                      <a:srgbClr val="FF6200"/>
                     </a:solidFill>
                     <a:lnL>
                       <a:noFill/>
@@ -7659,7 +7659,7 @@
                           </a:solidFill>
                           <a:latin typeface="Calibri"/>
                         </a:rPr>
-                        <a:t>Não localizado nas fontes acessíveis desta leitura</a:t>
+                        <a:t>-</a:t>
                       </a:r>
                     </a:p>
                   </a:txBody>
@@ -8057,7 +8057,7 @@
                       <a:r>
                         <a:rPr sz="1300" b="1">
                           <a:solidFill>
-                            <a:srgbClr val="1F1F1F"/>
+                            <a:srgbClr val="FFFFFF"/>
                           </a:solidFill>
                           <a:latin typeface="Calibri"/>
                         </a:rPr>
@@ -8067,7 +8067,7 @@
                   </a:txBody>
                   <a:tcPr marL="91440" marR="91440" marT="41148" marB="41148" anchor="ctr">
                     <a:solidFill>
-                      <a:srgbClr val="EC7000"/>
+                      <a:srgbClr val="FF6200"/>
                     </a:solidFill>
                     <a:lnL>
                       <a:noFill/>
@@ -8106,7 +8106,7 @@
                       <a:r>
                         <a:rPr sz="1300" b="1">
                           <a:solidFill>
-                            <a:srgbClr val="1F1F1F"/>
+                            <a:srgbClr val="FFFFFF"/>
                           </a:solidFill>
                           <a:latin typeface="Calibri"/>
                         </a:rPr>
@@ -8116,7 +8116,7 @@
                   </a:txBody>
                   <a:tcPr marL="91440" marR="91440" marT="41148" marB="41148" anchor="ctr">
                     <a:solidFill>
-                      <a:srgbClr val="EC7000"/>
+                      <a:srgbClr val="FF6200"/>
                     </a:solidFill>
                     <a:lnL>
                       <a:noFill/>
@@ -8628,7 +8628,7 @@
                       <a:r>
                         <a:rPr sz="1300" b="1">
                           <a:solidFill>
-                            <a:srgbClr val="1F1F1F"/>
+                            <a:srgbClr val="FFFFFF"/>
                           </a:solidFill>
                           <a:latin typeface="Calibri"/>
                         </a:rPr>
@@ -8638,7 +8638,7 @@
                   </a:txBody>
                   <a:tcPr marL="91440" marR="91440" marT="41148" marB="41148" anchor="ctr">
                     <a:solidFill>
-                      <a:srgbClr val="EC7000"/>
+                      <a:srgbClr val="FF6200"/>
                     </a:solidFill>
                     <a:lnL>
                       <a:noFill/>
@@ -8677,7 +8677,7 @@
                       <a:r>
                         <a:rPr sz="1300" b="1">
                           <a:solidFill>
-                            <a:srgbClr val="1F1F1F"/>
+                            <a:srgbClr val="FFFFFF"/>
                           </a:solidFill>
                           <a:latin typeface="Calibri"/>
                         </a:rPr>
@@ -8687,7 +8687,7 @@
                   </a:txBody>
                   <a:tcPr marL="91440" marR="91440" marT="41148" marB="41148" anchor="ctr">
                     <a:solidFill>
-                      <a:srgbClr val="EC7000"/>
+                      <a:srgbClr val="FF6200"/>
                     </a:solidFill>
                     <a:lnL>
                       <a:noFill/>
@@ -8801,7 +8801,7 @@
                           </a:solidFill>
                           <a:latin typeface="Calibri"/>
                         </a:rPr>
-                        <a:t>DC/PL e cotas/PL são candidatos; validar denominadores, subclasses e exclusões</a:t>
+                        <a:t>DC/PL e cotas/PL são candidatos</a:t>
                       </a:r>
                     </a:p>
                   </a:txBody>
